--- a/I Stand Amazed in the Presence.pptx
+++ b/I Stand Amazed in the Presence.pptx
@@ -249,7 +249,7 @@
           <a:p>
             <a:fld id="{E759A0DE-F190-5444-87AC-4719D5F20D15}" type="datetimeFigureOut">
               <a:rPr lang="en-US" smtClean="0"/>
-              <a:t>6/27/26</a:t>
+              <a:t>8/15/26</a:t>
             </a:fld>
             <a:endParaRPr lang="en-US"/>
           </a:p>
@@ -419,7 +419,7 @@
           <a:p>
             <a:fld id="{E759A0DE-F190-5444-87AC-4719D5F20D15}" type="datetimeFigureOut">
               <a:rPr lang="en-US" smtClean="0"/>
-              <a:t>6/27/26</a:t>
+              <a:t>8/15/26</a:t>
             </a:fld>
             <a:endParaRPr lang="en-US"/>
           </a:p>
@@ -599,7 +599,7 @@
           <a:p>
             <a:fld id="{E759A0DE-F190-5444-87AC-4719D5F20D15}" type="datetimeFigureOut">
               <a:rPr lang="en-US" smtClean="0"/>
-              <a:t>6/27/26</a:t>
+              <a:t>8/15/26</a:t>
             </a:fld>
             <a:endParaRPr lang="en-US"/>
           </a:p>
@@ -769,7 +769,7 @@
           <a:p>
             <a:fld id="{E759A0DE-F190-5444-87AC-4719D5F20D15}" type="datetimeFigureOut">
               <a:rPr lang="en-US" smtClean="0"/>
-              <a:t>6/27/26</a:t>
+              <a:t>8/15/26</a:t>
             </a:fld>
             <a:endParaRPr lang="en-US"/>
           </a:p>
@@ -1015,7 +1015,7 @@
           <a:p>
             <a:fld id="{E759A0DE-F190-5444-87AC-4719D5F20D15}" type="datetimeFigureOut">
               <a:rPr lang="en-US" smtClean="0"/>
-              <a:t>6/27/26</a:t>
+              <a:t>8/15/26</a:t>
             </a:fld>
             <a:endParaRPr lang="en-US"/>
           </a:p>
@@ -1247,7 +1247,7 @@
           <a:p>
             <a:fld id="{E759A0DE-F190-5444-87AC-4719D5F20D15}" type="datetimeFigureOut">
               <a:rPr lang="en-US" smtClean="0"/>
-              <a:t>6/27/26</a:t>
+              <a:t>8/15/26</a:t>
             </a:fld>
             <a:endParaRPr lang="en-US"/>
           </a:p>
@@ -1614,7 +1614,7 @@
           <a:p>
             <a:fld id="{E759A0DE-F190-5444-87AC-4719D5F20D15}" type="datetimeFigureOut">
               <a:rPr lang="en-US" smtClean="0"/>
-              <a:t>6/27/26</a:t>
+              <a:t>8/15/26</a:t>
             </a:fld>
             <a:endParaRPr lang="en-US"/>
           </a:p>
@@ -1732,7 +1732,7 @@
           <a:p>
             <a:fld id="{E759A0DE-F190-5444-87AC-4719D5F20D15}" type="datetimeFigureOut">
               <a:rPr lang="en-US" smtClean="0"/>
-              <a:t>6/27/26</a:t>
+              <a:t>8/15/26</a:t>
             </a:fld>
             <a:endParaRPr lang="en-US"/>
           </a:p>
@@ -1827,7 +1827,7 @@
           <a:p>
             <a:fld id="{E759A0DE-F190-5444-87AC-4719D5F20D15}" type="datetimeFigureOut">
               <a:rPr lang="en-US" smtClean="0"/>
-              <a:t>6/27/26</a:t>
+              <a:t>8/15/26</a:t>
             </a:fld>
             <a:endParaRPr lang="en-US"/>
           </a:p>
@@ -2104,7 +2104,7 @@
           <a:p>
             <a:fld id="{E759A0DE-F190-5444-87AC-4719D5F20D15}" type="datetimeFigureOut">
               <a:rPr lang="en-US" smtClean="0"/>
-              <a:t>6/27/26</a:t>
+              <a:t>8/15/26</a:t>
             </a:fld>
             <a:endParaRPr lang="en-US"/>
           </a:p>
@@ -2361,7 +2361,7 @@
           <a:p>
             <a:fld id="{E759A0DE-F190-5444-87AC-4719D5F20D15}" type="datetimeFigureOut">
               <a:rPr lang="en-US" smtClean="0"/>
-              <a:t>6/27/26</a:t>
+              <a:t>8/15/26</a:t>
             </a:fld>
             <a:endParaRPr lang="en-US"/>
           </a:p>
@@ -2574,7 +2574,7 @@
           <a:p>
             <a:fld id="{E759A0DE-F190-5444-87AC-4719D5F20D15}" type="datetimeFigureOut">
               <a:rPr lang="en-US" smtClean="0"/>
-              <a:t>6/27/26</a:t>
+              <a:t>8/15/26</a:t>
             </a:fld>
             <a:endParaRPr lang="en-US"/>
           </a:p>
@@ -3035,6 +3035,81 @@
           </a:p>
         </p:txBody>
       </p:sp>
+      <p:sp>
+        <p:nvSpPr>
+          <p:cNvPr id="2" name="TextBox 1">
+            <a:extLst>
+              <a:ext uri="{FF2B5EF4-FFF2-40B4-BE49-F238E27FC236}">
+                <a16:creationId xmlns:a16="http://schemas.microsoft.com/office/drawing/2014/main" id="{9AB1B68A-E341-6F04-1871-1FA936540EF7}"/>
+              </a:ext>
+            </a:extLst>
+          </p:cNvPr>
+          <p:cNvSpPr txBox="1"/>
+          <p:nvPr/>
+        </p:nvSpPr>
+        <p:spPr>
+          <a:xfrm>
+            <a:off x="168442" y="5444311"/>
+            <a:ext cx="8807115" cy="923330"/>
+          </a:xfrm>
+          <a:prstGeom prst="rect">
+            <a:avLst/>
+          </a:prstGeom>
+          <a:noFill/>
+        </p:spPr>
+        <p:txBody>
+          <a:bodyPr wrap="square" rtlCol="0">
+            <a:spAutoFit/>
+          </a:bodyPr>
+          <a:lstStyle/>
+          <a:p>
+            <a:pPr algn="ctr"/>
+            <a:r>
+              <a:rPr lang="en-US" dirty="0">
+                <a:solidFill>
+                  <a:schemeClr val="bg1"/>
+                </a:solidFill>
+              </a:rPr>
+              <a:t>Words &amp; Music by Charles H. </a:t>
+            </a:r>
+            <a:r>
+              <a:rPr lang="en-US">
+                <a:solidFill>
+                  <a:schemeClr val="bg1"/>
+                </a:solidFill>
+              </a:rPr>
+              <a:t>Gabriel (1905)</a:t>
+            </a:r>
+            <a:endParaRPr lang="en-US" dirty="0">
+              <a:solidFill>
+                <a:schemeClr val="bg1"/>
+              </a:solidFill>
+            </a:endParaRPr>
+          </a:p>
+          <a:p>
+            <a:pPr algn="ctr"/>
+            <a:r>
+              <a:rPr lang="en-US" dirty="0">
+                <a:solidFill>
+                  <a:schemeClr val="bg1"/>
+                </a:solidFill>
+              </a:rPr>
+              <a:t>Public Domain</a:t>
+            </a:r>
+          </a:p>
+          <a:p>
+            <a:pPr algn="ctr"/>
+            <a:r>
+              <a:rPr lang="en-US" dirty="0">
+                <a:solidFill>
+                  <a:schemeClr val="bg1"/>
+                </a:solidFill>
+              </a:rPr>
+              <a:t>CCLI License #137776</a:t>
+            </a:r>
+          </a:p>
+        </p:txBody>
+      </p:sp>
     </p:spTree>
     <p:extLst>
       <p:ext uri="{BB962C8B-B14F-4D97-AF65-F5344CB8AC3E}">
@@ -3912,45 +3987,6 @@
               <a:latin typeface="Avenir Medium" panose="02000503020000020003" pitchFamily="2" charset="0"/>
               <a:ea typeface="Bodoni Ornaments" pitchFamily="2" charset="0"/>
             </a:endParaRPr>
-          </a:p>
-        </p:txBody>
-      </p:sp>
-      <p:sp>
-        <p:nvSpPr>
-          <p:cNvPr id="2" name="TextBox 1">
-            <a:extLst>
-              <a:ext uri="{FF2B5EF4-FFF2-40B4-BE49-F238E27FC236}">
-                <a16:creationId xmlns:a16="http://schemas.microsoft.com/office/drawing/2014/main" id="{5DE5347E-CB9A-43DD-8F01-CD210F411994}"/>
-              </a:ext>
-            </a:extLst>
-          </p:cNvPr>
-          <p:cNvSpPr txBox="1"/>
-          <p:nvPr/>
-        </p:nvSpPr>
-        <p:spPr>
-          <a:xfrm>
-            <a:off x="7390614" y="6488668"/>
-            <a:ext cx="1753386" cy="369332"/>
-          </a:xfrm>
-          <a:prstGeom prst="rect">
-            <a:avLst/>
-          </a:prstGeom>
-          <a:noFill/>
-        </p:spPr>
-        <p:txBody>
-          <a:bodyPr wrap="square" rtlCol="0">
-            <a:spAutoFit/>
-          </a:bodyPr>
-          <a:lstStyle/>
-          <a:p>
-            <a:r>
-              <a:rPr lang="en-US" dirty="0">
-                <a:solidFill>
-                  <a:schemeClr val="bg1"/>
-                </a:solidFill>
-              </a:rPr>
-              <a:t>CCLI#7102397</a:t>
-            </a:r>
           </a:p>
         </p:txBody>
       </p:sp>
